--- a/assets/powerpoints/module-activite/B2-il-faut-il-est-important-de.pptx
+++ b/assets/powerpoints/module-activite/B2-il-faut-il-est-important-de.pptx
@@ -11022,7 +11022,25 @@
                 </a:solidFill>
                 <a:latin typeface="Verdana"/>
               </a:rPr>
-              <a:t>« Il faut que vous soyez là. » · « Il est important qu'il n'ait pas peur. » Cette forme s'appelle le subjonctif. Le cours vous demande de la &lt;b&gt;reconnaître&lt;/b&gt;, pas de la produire.</a:t>
+              <a:t>« Il faut que vous soyez là. » · « Il est important qu'il n'ait pas peur. » Cette forme s'appelle le subjonctif. Le cours vous demande de la </a:t>
+            </a:r>
+            <a:r>
+              <a:rPr sz="2000" b="1" i="0">
+                <a:solidFill>
+                  <a:srgbClr val="4B4F52"/>
+                </a:solidFill>
+                <a:latin typeface="Verdana"/>
+              </a:rPr>
+              <a:t>reconnaître</a:t>
+            </a:r>
+            <a:r>
+              <a:rPr sz="2000" b="0" i="0">
+                <a:solidFill>
+                  <a:srgbClr val="4B4F52"/>
+                </a:solidFill>
+                <a:latin typeface="Verdana"/>
+              </a:rPr>
+              <a:t>, pas de la produire.</a:t>
             </a:r>
           </a:p>
         </p:txBody>
